--- a/大模型调度 v2.pptx
+++ b/大模型调度 v2.pptx
@@ -3081,7 +3081,7 @@
               <a:rPr lang="zh-CN" altLang="en-US" sz="2000" b="1" kern="0" dirty="0">
                 <a:ea typeface="微软雅黑" panose="020B0503020204020204" pitchFamily="34" charset="-122"/>
               </a:rPr>
-              <a:t>的推理范式与调度系统的运行机制存在冲突。</a:t>
+              <a:t>的推理范式与调度系统的运行机制存在信息断层。</a:t>
             </a:r>
             <a:endParaRPr lang="en-US" altLang="zh-CN" sz="2000" b="1" kern="0" dirty="0">
               <a:ea typeface="微软雅黑" panose="020B0503020204020204" pitchFamily="34" charset="-122"/>
@@ -3095,7 +3095,7 @@
             </a:pPr>
             <a:r>
               <a:rPr lang="zh-CN" altLang="en-US" sz="2000" dirty="0"/>
-              <a:t>调度系统依赖于对集群底层状态的实时监测，而大模型无法直接从底层海量指标直接推理到策略选择。</a:t>
+              <a:t>调度系统依赖于对集群底层状态的实时监测，而大模型无法直接从底层海量指标直接推理到策略选择，存在一定的语义跨度。</a:t>
             </a:r>
             <a:endParaRPr lang="zh-CN" altLang="en-US" sz="2000" b="1" kern="0" dirty="0">
               <a:ea typeface="微软雅黑" panose="020B0503020204020204" pitchFamily="34" charset="-122"/>
